--- a/presentation/TalentHub - Análisis del Mercado Laboral Data Analyst.pptx
+++ b/presentation/TalentHub - Análisis del Mercado Laboral Data Analyst.pptx
@@ -4893,7 +4893,7 @@
         </p:nvSpPr>
         <p:spPr>
           <a:xfrm>
-            <a:off x="571500" y="205026"/>
+            <a:off x="590550" y="604005"/>
             <a:ext cx="11601450" cy="861774"/>
           </a:xfrm>
           <a:prstGeom prst="rect">
@@ -4910,18 +4910,12 @@
             <a:pPr algn="l"/>
             <a:r>
               <a:rPr lang="es-ES" sz="2800" b="1" dirty="0"/>
-              <a:t>TalentHub necesita diseñar y estructurar un nuevo bootcamp de Data Analytics alineado con las demandas reales del mercado laboral</a:t>
-            </a:r>
-            <a:r>
-              <a:rPr lang="es-ES" sz="2800" dirty="0"/>
-              <a:t>.</a:t>
-            </a:r>
-            <a:endParaRPr lang="es-AR" sz="2550" b="1" i="0" u="none" dirty="0">
-              <a:solidFill>
-                <a:srgbClr val="0F172A"/>
-              </a:solidFill>
-              <a:latin typeface="Poppins"/>
-            </a:endParaRPr>
+              <a:t>Identificar las habilidades más demandadas por el mercado.</a:t>
+            </a:r>
+          </a:p>
+          <a:p>
+            <a:pPr algn="l"/>
+            <a:endParaRPr lang="es-ES" sz="2800" b="1" dirty="0"/>
           </a:p>
         </p:txBody>
       </p:sp>
